--- a/08 - Neural Fitted Q (NFQ)/slides.pptx
+++ b/08 - Neural Fitted Q (NFQ)/slides.pptx
@@ -287,7 +287,7 @@
 <file path=ppt/revisionInfo.xml><?xml version="1.0" encoding="utf-8"?>
 <p1510:revInfo xmlns:a="http://schemas.openxmlformats.org/drawingml/2006/main" xmlns:r="http://schemas.openxmlformats.org/officeDocument/2006/relationships" xmlns:p1510="http://schemas.microsoft.com/office/powerpoint/2015/10/main">
   <p1510:revLst>
-    <p1510:client id="{E5BC49A5-A3F2-5144-AEA6-B272ADE3D00F}" v="4" dt="2025-10-02T10:26:51.281"/>
+    <p1510:client id="{E5BC49A5-A3F2-5144-AEA6-B272ADE3D00F}" v="5" dt="2025-10-10T13:39:16.177"/>
   </p1510:revLst>
 </p1510:revInfo>
 </file>
@@ -1657,7 +1657,7 @@
   <pc:docChgLst>
     <pc:chgData name="Riccardo Berta" userId="c8694f89-bba4-4576-b0a8-456619ca5a8c" providerId="ADAL" clId="{FDDBFC5A-5EA9-5330-BEB8-433D7E3B4C4E}"/>
     <pc:docChg chg="custSel modSld">
-      <pc:chgData name="Riccardo Berta" userId="c8694f89-bba4-4576-b0a8-456619ca5a8c" providerId="ADAL" clId="{FDDBFC5A-5EA9-5330-BEB8-433D7E3B4C4E}" dt="2025-10-02T10:26:56.992" v="22" actId="1076"/>
+      <pc:chgData name="Riccardo Berta" userId="c8694f89-bba4-4576-b0a8-456619ca5a8c" providerId="ADAL" clId="{FDDBFC5A-5EA9-5330-BEB8-433D7E3B4C4E}" dt="2025-10-10T13:39:16.177" v="111"/>
       <pc:docMkLst>
         <pc:docMk/>
       </pc:docMkLst>
@@ -1675,14 +1675,6 @@
             <ac:picMk id="2" creationId="{25C59F0B-ADDC-C3F2-0600-F9BCA78AEA1D}"/>
           </ac:picMkLst>
         </pc:picChg>
-        <pc:picChg chg="del">
-          <ac:chgData name="Riccardo Berta" userId="c8694f89-bba4-4576-b0a8-456619ca5a8c" providerId="ADAL" clId="{FDDBFC5A-5EA9-5330-BEB8-433D7E3B4C4E}" dt="2025-10-02T10:20:09.920" v="0" actId="478"/>
-          <ac:picMkLst>
-            <pc:docMk/>
-            <pc:sldMk cId="2611114984" sldId="281"/>
-            <ac:picMk id="4" creationId="{6922D57B-62BF-F903-D7C1-4F60DF2B51C2}"/>
-          </ac:picMkLst>
-        </pc:picChg>
       </pc:sldChg>
       <pc:sldChg chg="addSp delSp modSp mod">
         <pc:chgData name="Riccardo Berta" userId="c8694f89-bba4-4576-b0a8-456619ca5a8c" providerId="ADAL" clId="{FDDBFC5A-5EA9-5330-BEB8-433D7E3B4C4E}" dt="2025-10-02T10:22:28.968" v="11" actId="14100"/>
@@ -1698,14 +1690,6 @@
             <ac:picMk id="2" creationId="{C5EC8C93-6E23-E022-0237-E68794DB6B29}"/>
           </ac:picMkLst>
         </pc:picChg>
-        <pc:picChg chg="del">
-          <ac:chgData name="Riccardo Berta" userId="c8694f89-bba4-4576-b0a8-456619ca5a8c" providerId="ADAL" clId="{FDDBFC5A-5EA9-5330-BEB8-433D7E3B4C4E}" dt="2025-10-02T10:22:20.777" v="7" actId="478"/>
-          <ac:picMkLst>
-            <pc:docMk/>
-            <pc:sldMk cId="1411358188" sldId="282"/>
-            <ac:picMk id="6" creationId="{68E31759-0BE6-65F9-52FE-6F85BDF652AE}"/>
-          </ac:picMkLst>
-        </pc:picChg>
       </pc:sldChg>
       <pc:sldChg chg="addSp delSp modSp mod">
         <pc:chgData name="Riccardo Berta" userId="c8694f89-bba4-4576-b0a8-456619ca5a8c" providerId="ADAL" clId="{FDDBFC5A-5EA9-5330-BEB8-433D7E3B4C4E}" dt="2025-10-02T10:25:11.509" v="17" actId="1076"/>
@@ -1721,14 +1705,6 @@
             <ac:picMk id="2" creationId="{98E9B487-E9AA-6FCF-A4B0-99E5B2359FCE}"/>
           </ac:picMkLst>
         </pc:picChg>
-        <pc:picChg chg="del">
-          <ac:chgData name="Riccardo Berta" userId="c8694f89-bba4-4576-b0a8-456619ca5a8c" providerId="ADAL" clId="{FDDBFC5A-5EA9-5330-BEB8-433D7E3B4C4E}" dt="2025-10-02T10:25:03.832" v="12" actId="478"/>
-          <ac:picMkLst>
-            <pc:docMk/>
-            <pc:sldMk cId="3815001471" sldId="283"/>
-            <ac:picMk id="4" creationId="{AD1EF577-77F0-1361-4E26-9B96C5D33172}"/>
-          </ac:picMkLst>
-        </pc:picChg>
       </pc:sldChg>
       <pc:sldChg chg="addSp delSp modSp mod">
         <pc:chgData name="Riccardo Berta" userId="c8694f89-bba4-4576-b0a8-456619ca5a8c" providerId="ADAL" clId="{FDDBFC5A-5EA9-5330-BEB8-433D7E3B4C4E}" dt="2025-10-02T10:26:56.992" v="22" actId="1076"/>
@@ -1744,12 +1720,27 @@
             <ac:picMk id="3" creationId="{5F2D06E5-A3FB-B257-B078-DAA66ADB1A60}"/>
           </ac:picMkLst>
         </pc:picChg>
-        <pc:picChg chg="del">
-          <ac:chgData name="Riccardo Berta" userId="c8694f89-bba4-4576-b0a8-456619ca5a8c" providerId="ADAL" clId="{FDDBFC5A-5EA9-5330-BEB8-433D7E3B4C4E}" dt="2025-10-02T10:26:50.210" v="18" actId="478"/>
+      </pc:sldChg>
+      <pc:sldChg chg="addSp modSp mod">
+        <pc:chgData name="Riccardo Berta" userId="c8694f89-bba4-4576-b0a8-456619ca5a8c" providerId="ADAL" clId="{FDDBFC5A-5EA9-5330-BEB8-433D7E3B4C4E}" dt="2025-10-10T13:39:16.177" v="111"/>
+        <pc:sldMkLst>
+          <pc:docMk/>
+          <pc:sldMk cId="1578067628" sldId="299"/>
+        </pc:sldMkLst>
+        <pc:spChg chg="mod">
+          <ac:chgData name="Riccardo Berta" userId="c8694f89-bba4-4576-b0a8-456619ca5a8c" providerId="ADAL" clId="{FDDBFC5A-5EA9-5330-BEB8-433D7E3B4C4E}" dt="2025-10-10T13:39:09.345" v="110" actId="20577"/>
+          <ac:spMkLst>
+            <pc:docMk/>
+            <pc:sldMk cId="1578067628" sldId="299"/>
+            <ac:spMk id="84" creationId="{00000000-0000-0000-0000-000000000000}"/>
+          </ac:spMkLst>
+        </pc:spChg>
+        <pc:picChg chg="add mod">
+          <ac:chgData name="Riccardo Berta" userId="c8694f89-bba4-4576-b0a8-456619ca5a8c" providerId="ADAL" clId="{FDDBFC5A-5EA9-5330-BEB8-433D7E3B4C4E}" dt="2025-10-10T13:39:16.177" v="111"/>
           <ac:picMkLst>
             <pc:docMk/>
-            <pc:sldMk cId="2506133898" sldId="284"/>
-            <ac:picMk id="5" creationId="{DE213E05-0F8A-48A5-DD42-9C7F00B30283}"/>
+            <pc:sldMk cId="1578067628" sldId="299"/>
+            <ac:picMk id="2" creationId="{91E421C9-1F3B-33F8-F5F9-5018D19A6C33}"/>
           </ac:picMkLst>
         </pc:picChg>
       </pc:sldChg>
@@ -12449,6 +12440,20 @@
             </a:r>
           </a:p>
           <a:p>
+            <a:r>
+              <a:rPr lang="en-GB" dirty="0"/>
+              <a:t>We can run a </a:t>
+            </a:r>
+            <a:r>
+              <a:rPr lang="en-GB" b="1" dirty="0"/>
+              <a:t>grid search </a:t>
+            </a:r>
+            <a:r>
+              <a:rPr lang="en-GB" dirty="0"/>
+              <a:t>experiment to find the best parameters</a:t>
+            </a:r>
+          </a:p>
+          <a:p>
             <a:pPr lvl="0"/>
             <a:endParaRPr lang="en-GB" dirty="0"/>
           </a:p>
@@ -12458,6 +12463,36 @@
           </a:p>
         </p:txBody>
       </p:sp>
+      <p:pic>
+        <p:nvPicPr>
+          <p:cNvPr id="2" name="Immagine 1" descr="Immagine che contiene Carattere, Elementi grafici, logo, cerchio&#10;&#10;Descrizione generata automaticamente">
+            <a:extLst>
+              <a:ext uri="{FF2B5EF4-FFF2-40B4-BE49-F238E27FC236}">
+                <a16:creationId xmlns:a16="http://schemas.microsoft.com/office/drawing/2014/main" id="{91E421C9-1F3B-33F8-F5F9-5018D19A6C33}"/>
+              </a:ext>
+            </a:extLst>
+          </p:cNvPr>
+          <p:cNvPicPr>
+            <a:picLocks noChangeAspect="1"/>
+          </p:cNvPicPr>
+          <p:nvPr/>
+        </p:nvPicPr>
+        <p:blipFill>
+          <a:blip r:embed="rId3"/>
+          <a:stretch>
+            <a:fillRect/>
+          </a:stretch>
+        </p:blipFill>
+        <p:spPr>
+          <a:xfrm>
+            <a:off x="8661328" y="65196"/>
+            <a:ext cx="407258" cy="495579"/>
+          </a:xfrm>
+          <a:prstGeom prst="rect">
+            <a:avLst/>
+          </a:prstGeom>
+        </p:spPr>
+      </p:pic>
     </p:spTree>
     <p:extLst>
       <p:ext uri="{BB962C8B-B14F-4D97-AF65-F5344CB8AC3E}">
@@ -14482,6 +14517,17 @@
 </file>
 
 <file path=customXml/item1.xml><?xml version="1.0" encoding="utf-8"?>
+<p:properties xmlns:p="http://schemas.microsoft.com/office/2006/metadata/properties" xmlns:xsi="http://www.w3.org/2001/XMLSchema-instance" xmlns:pc="http://schemas.microsoft.com/office/infopath/2007/PartnerControls">
+  <documentManagement>
+    <TaxCatchAll xmlns="e9b5433c-2372-4cb7-8bab-09518096b29b" xsi:nil="true"/>
+    <lcf76f155ced4ddcb4097134ff3c332f xmlns="3bd0d43f-5e5b-43cd-b6fc-691bd77672c6">
+      <Terms xmlns="http://schemas.microsoft.com/office/infopath/2007/PartnerControls"/>
+    </lcf76f155ced4ddcb4097134ff3c332f>
+  </documentManagement>
+</p:properties>
+</file>
+
+<file path=customXml/item2.xml><?xml version="1.0" encoding="utf-8"?>
 <ct:contentTypeSchema xmlns:ct="http://schemas.microsoft.com/office/2006/metadata/contentType" xmlns:ma="http://schemas.microsoft.com/office/2006/metadata/properties/metaAttributes" ct:_="" ma:_="" ma:contentTypeName="Documento" ma:contentTypeID="0x010100B8FA822B18A0634FB7342CF29752587A" ma:contentTypeVersion="13" ma:contentTypeDescription="Creare un nuovo documento." ma:contentTypeScope="" ma:versionID="5c5a1a1f66437ceed8e2102d49525b77">
   <xsd:schema xmlns:xsd="http://www.w3.org/2001/XMLSchema" xmlns:xs="http://www.w3.org/2001/XMLSchema" xmlns:p="http://schemas.microsoft.com/office/2006/metadata/properties" xmlns:ns2="3bd0d43f-5e5b-43cd-b6fc-691bd77672c6" xmlns:ns3="e9b5433c-2372-4cb7-8bab-09518096b29b" targetNamespace="http://schemas.microsoft.com/office/2006/metadata/properties" ma:root="true" ma:fieldsID="79bbaae61552c66980d55f32a6cab4b6" ns2:_="" ns3:_="">
     <xsd:import namespace="3bd0d43f-5e5b-43cd-b6fc-691bd77672c6"/>
@@ -14688,17 +14734,6 @@
 </ct:contentTypeSchema>
 </file>
 
-<file path=customXml/item2.xml><?xml version="1.0" encoding="utf-8"?>
-<p:properties xmlns:p="http://schemas.microsoft.com/office/2006/metadata/properties" xmlns:xsi="http://www.w3.org/2001/XMLSchema-instance" xmlns:pc="http://schemas.microsoft.com/office/infopath/2007/PartnerControls">
-  <documentManagement>
-    <TaxCatchAll xmlns="e9b5433c-2372-4cb7-8bab-09518096b29b" xsi:nil="true"/>
-    <lcf76f155ced4ddcb4097134ff3c332f xmlns="3bd0d43f-5e5b-43cd-b6fc-691bd77672c6">
-      <Terms xmlns="http://schemas.microsoft.com/office/infopath/2007/PartnerControls"/>
-    </lcf76f155ced4ddcb4097134ff3c332f>
-  </documentManagement>
-</p:properties>
-</file>
-
 <file path=customXml/item3.xml><?xml version="1.0" encoding="utf-8"?>
 <?mso-contentType ?>
 <FormTemplates xmlns="http://schemas.microsoft.com/sharepoint/v3/contenttype/forms">
@@ -14709,6 +14744,23 @@
 </file>
 
 <file path=customXml/itemProps1.xml><?xml version="1.0" encoding="utf-8"?>
+<ds:datastoreItem xmlns:ds="http://schemas.openxmlformats.org/officeDocument/2006/customXml" ds:itemID="{669FCBEF-C3E3-44E1-8B4F-C9903419375D}">
+  <ds:schemaRefs>
+    <ds:schemaRef ds:uri="http://purl.org/dc/terms/"/>
+    <ds:schemaRef ds:uri="http://schemas.microsoft.com/office/2006/documentManagement/types"/>
+    <ds:schemaRef ds:uri="http://schemas.microsoft.com/office/infopath/2007/PartnerControls"/>
+    <ds:schemaRef ds:uri="http://schemas.microsoft.com/office/2006/metadata/properties"/>
+    <ds:schemaRef ds:uri="http://purl.org/dc/dcmitype/"/>
+    <ds:schemaRef ds:uri="3bd0d43f-5e5b-43cd-b6fc-691bd77672c6"/>
+    <ds:schemaRef ds:uri="e9b5433c-2372-4cb7-8bab-09518096b29b"/>
+    <ds:schemaRef ds:uri="http://www.w3.org/XML/1998/namespace"/>
+    <ds:schemaRef ds:uri="http://schemas.openxmlformats.org/package/2006/metadata/core-properties"/>
+    <ds:schemaRef ds:uri="http://purl.org/dc/elements/1.1/"/>
+  </ds:schemaRefs>
+</ds:datastoreItem>
+</file>
+
+<file path=customXml/itemProps2.xml><?xml version="1.0" encoding="utf-8"?>
 <ds:datastoreItem xmlns:ds="http://schemas.openxmlformats.org/officeDocument/2006/customXml" ds:itemID="{DFD75012-9612-47E2-A19A-DBEFFBE78E98}">
   <ds:schemaRefs>
     <ds:schemaRef ds:uri="http://schemas.microsoft.com/office/2006/metadata/contentType"/>
@@ -14727,23 +14779,6 @@
 </ds:datastoreItem>
 </file>
 
-<file path=customXml/itemProps2.xml><?xml version="1.0" encoding="utf-8"?>
-<ds:datastoreItem xmlns:ds="http://schemas.openxmlformats.org/officeDocument/2006/customXml" ds:itemID="{669FCBEF-C3E3-44E1-8B4F-C9903419375D}">
-  <ds:schemaRefs>
-    <ds:schemaRef ds:uri="e9b5433c-2372-4cb7-8bab-09518096b29b"/>
-    <ds:schemaRef ds:uri="http://purl.org/dc/terms/"/>
-    <ds:schemaRef ds:uri="3bd0d43f-5e5b-43cd-b6fc-691bd77672c6"/>
-    <ds:schemaRef ds:uri="http://www.w3.org/XML/1998/namespace"/>
-    <ds:schemaRef ds:uri="http://purl.org/dc/dcmitype/"/>
-    <ds:schemaRef ds:uri="http://schemas.microsoft.com/office/2006/metadata/properties"/>
-    <ds:schemaRef ds:uri="http://schemas.microsoft.com/office/2006/documentManagement/types"/>
-    <ds:schemaRef ds:uri="http://schemas.microsoft.com/office/infopath/2007/PartnerControls"/>
-    <ds:schemaRef ds:uri="http://schemas.openxmlformats.org/package/2006/metadata/core-properties"/>
-    <ds:schemaRef ds:uri="http://purl.org/dc/elements/1.1/"/>
-  </ds:schemaRefs>
-</ds:datastoreItem>
-</file>
-
 <file path=customXml/itemProps3.xml><?xml version="1.0" encoding="utf-8"?>
 <ds:datastoreItem xmlns:ds="http://schemas.openxmlformats.org/officeDocument/2006/customXml" ds:itemID="{7B9F123E-5225-44F0-B95C-4FD63E5887E6}">
   <ds:schemaRefs>
